--- a/Synkro_PFA_Defense.pptx
+++ b/Synkro_PFA_Defense.pptx
@@ -5097,15 +5097,15 @@
         </p:nvPicPr>
         <p:blipFill>
           <a:blip r:embed="rId3"/>
-          <a:srcRect b="18755"/>
+          <a:srcRect/>
           <a:stretch>
             <a:fillRect/>
           </a:stretch>
         </p:blipFill>
         <p:spPr>
           <a:xfrm>
-            <a:off x="1249527" y="1425391"/>
-            <a:ext cx="9692640" cy="4665586"/>
+            <a:off x="1249527" y="1479208"/>
+            <a:ext cx="9692640" cy="4557952"/>
           </a:xfrm>
           <a:prstGeom prst="rect">
             <a:avLst/>
@@ -14370,8 +14370,8 @@
         </p:blipFill>
         <p:spPr>
           <a:xfrm>
-            <a:off x="6172200" y="1554480"/>
-            <a:ext cx="5486400" cy="4219074"/>
+            <a:off x="6172200" y="1984041"/>
+            <a:ext cx="5486400" cy="3359951"/>
           </a:xfrm>
           <a:prstGeom prst="rect">
             <a:avLst/>
@@ -14598,8 +14598,8 @@
         </p:blipFill>
         <p:spPr>
           <a:xfrm>
-            <a:off x="1340968" y="1600200"/>
-            <a:ext cx="9509760" cy="3770634"/>
+            <a:off x="1340968" y="1568123"/>
+            <a:ext cx="9509760" cy="3834788"/>
           </a:xfrm>
           <a:prstGeom prst="rect">
             <a:avLst/>

--- a/Synkro_PFA_Defense.pptx
+++ b/Synkro_PFA_Defense.pptx
@@ -15,6 +15,7 @@
     <p:sldId id="260" r:id="rId6"/>
     <p:sldId id="261" r:id="rId7"/>
     <p:sldId id="262" r:id="rId8"/>
+    <p:sldId id="275" r:id="rId26"/>
     <p:sldId id="263" r:id="rId9"/>
     <p:sldId id="264" r:id="rId10"/>
     <p:sldId id="265" r:id="rId11"/>
@@ -2538,7 +2539,7 @@
         <p:spPr>
           <a:xfrm>
             <a:off x="0" y="6784848"/>
-            <a:ext cx="641668" cy="41148"/>
+            <a:ext cx="609585" cy="41148"/>
           </a:xfrm>
           <a:prstGeom prst="rect">
             <a:avLst/>
@@ -2589,7 +2590,7 @@
                 <a:ea typeface="Calibri" pitchFamily="34" charset="-122"/>
                 <a:cs typeface="Calibri" pitchFamily="34" charset="-120"/>
               </a:rPr>
-              <a:t>01 / 19</a:t>
+              <a:t>01 / 20</a:t>
             </a:r>
             <a:endParaRPr lang="en-US" sz="1000" dirty="0"/>
           </a:p>
@@ -2664,7 +2665,7 @@
         <p:spPr>
           <a:xfrm>
             <a:off x="0" y="6784848"/>
-            <a:ext cx="6416682" cy="41148"/>
+            <a:ext cx="6705432" cy="41148"/>
           </a:xfrm>
           <a:prstGeom prst="rect">
             <a:avLst/>
@@ -2715,7 +2716,7 @@
                 <a:ea typeface="Calibri" pitchFamily="34" charset="-122"/>
                 <a:cs typeface="Calibri" pitchFamily="34" charset="-120"/>
               </a:rPr>
-              <a:t>10 / 19</a:t>
+              <a:t>11 / 20</a:t>
             </a:r>
             <a:endParaRPr lang="en-US" sz="1000" dirty="0"/>
           </a:p>
@@ -3236,7 +3237,7 @@
         <p:spPr>
           <a:xfrm>
             <a:off x="0" y="6784848"/>
-            <a:ext cx="7058350" cy="41148"/>
+            <a:ext cx="7315017" cy="41148"/>
           </a:xfrm>
           <a:prstGeom prst="rect">
             <a:avLst/>
@@ -3287,7 +3288,7 @@
                 <a:ea typeface="Calibri" pitchFamily="34" charset="-122"/>
                 <a:cs typeface="Calibri" pitchFamily="34" charset="-120"/>
               </a:rPr>
-              <a:t>11 / 19</a:t>
+              <a:t>12 / 20</a:t>
             </a:r>
             <a:endParaRPr lang="en-US" sz="1000" dirty="0"/>
           </a:p>
@@ -3808,7 +3809,7 @@
         <p:spPr>
           <a:xfrm>
             <a:off x="0" y="6784848"/>
-            <a:ext cx="7700018" cy="41148"/>
+            <a:ext cx="7924602" cy="41148"/>
           </a:xfrm>
           <a:prstGeom prst="rect">
             <a:avLst/>
@@ -3859,7 +3860,7 @@
                 <a:ea typeface="Calibri" pitchFamily="34" charset="-122"/>
                 <a:cs typeface="Calibri" pitchFamily="34" charset="-120"/>
               </a:rPr>
-              <a:t>12 / 19</a:t>
+              <a:t>13 / 20</a:t>
             </a:r>
             <a:endParaRPr lang="en-US" sz="1000" dirty="0"/>
           </a:p>
@@ -4380,7 +4381,7 @@
         <p:spPr>
           <a:xfrm>
             <a:off x="0" y="6784848"/>
-            <a:ext cx="8341686" cy="41148"/>
+            <a:ext cx="8534186" cy="41148"/>
           </a:xfrm>
           <a:prstGeom prst="rect">
             <a:avLst/>
@@ -4431,7 +4432,7 @@
                 <a:ea typeface="Calibri" pitchFamily="34" charset="-122"/>
                 <a:cs typeface="Calibri" pitchFamily="34" charset="-120"/>
               </a:rPr>
-              <a:t>13 / 19</a:t>
+              <a:t>14 / 20</a:t>
             </a:r>
             <a:endParaRPr lang="en-US" sz="1000" dirty="0"/>
           </a:p>
@@ -4952,7 +4953,7 @@
         <p:spPr>
           <a:xfrm>
             <a:off x="0" y="6784848"/>
-            <a:ext cx="8983354" cy="41148"/>
+            <a:ext cx="9143771" cy="41148"/>
           </a:xfrm>
           <a:prstGeom prst="rect">
             <a:avLst/>
@@ -5003,7 +5004,7 @@
                 <a:ea typeface="Calibri" pitchFamily="34" charset="-122"/>
                 <a:cs typeface="Calibri" pitchFamily="34" charset="-120"/>
               </a:rPr>
-              <a:t>14 / 19</a:t>
+              <a:t>15 / 20</a:t>
             </a:r>
             <a:endParaRPr lang="en-US" sz="1000" dirty="0"/>
           </a:p>
@@ -5181,7 +5182,7 @@
         <p:spPr>
           <a:xfrm>
             <a:off x="0" y="6784848"/>
-            <a:ext cx="9625023" cy="41148"/>
+            <a:ext cx="9753356" cy="41148"/>
           </a:xfrm>
           <a:prstGeom prst="rect">
             <a:avLst/>
@@ -5232,7 +5233,7 @@
                 <a:ea typeface="Calibri" pitchFamily="34" charset="-122"/>
                 <a:cs typeface="Calibri" pitchFamily="34" charset="-120"/>
               </a:rPr>
-              <a:t>15 / 19</a:t>
+              <a:t>16 / 20</a:t>
             </a:r>
             <a:endParaRPr lang="en-US" sz="1000" dirty="0"/>
           </a:p>
@@ -5852,7 +5853,7 @@
         <p:spPr>
           <a:xfrm>
             <a:off x="0" y="6784848"/>
-            <a:ext cx="10266691" cy="41148"/>
+            <a:ext cx="10362941" cy="41148"/>
           </a:xfrm>
           <a:prstGeom prst="rect">
             <a:avLst/>
@@ -5903,7 +5904,7 @@
                 <a:ea typeface="Calibri" pitchFamily="34" charset="-122"/>
                 <a:cs typeface="Calibri" pitchFamily="34" charset="-120"/>
               </a:rPr>
-              <a:t>16 / 19</a:t>
+              <a:t>17 / 20</a:t>
             </a:r>
             <a:endParaRPr lang="en-US" sz="1000" dirty="0"/>
           </a:p>
@@ -6504,7 +6505,7 @@
         <p:spPr>
           <a:xfrm>
             <a:off x="0" y="6784848"/>
-            <a:ext cx="10908359" cy="41148"/>
+            <a:ext cx="10972526" cy="41148"/>
           </a:xfrm>
           <a:prstGeom prst="rect">
             <a:avLst/>
@@ -6555,7 +6556,7 @@
                 <a:ea typeface="Calibri" pitchFamily="34" charset="-122"/>
                 <a:cs typeface="Calibri" pitchFamily="34" charset="-120"/>
               </a:rPr>
-              <a:t>17 / 19</a:t>
+              <a:t>18 / 20</a:t>
             </a:r>
             <a:endParaRPr lang="en-US" sz="1000" dirty="0"/>
           </a:p>
@@ -7512,7 +7513,7 @@
         <p:spPr>
           <a:xfrm>
             <a:off x="0" y="6784848"/>
-            <a:ext cx="11550027" cy="41148"/>
+            <a:ext cx="11582110" cy="41148"/>
           </a:xfrm>
           <a:prstGeom prst="rect">
             <a:avLst/>
@@ -7563,7 +7564,7 @@
                 <a:ea typeface="Calibri" pitchFamily="34" charset="-122"/>
                 <a:cs typeface="Calibri" pitchFamily="34" charset="-120"/>
               </a:rPr>
-              <a:t>18 / 19</a:t>
+              <a:t>19 / 20</a:t>
             </a:r>
             <a:endParaRPr lang="en-US" sz="1000" dirty="0"/>
           </a:p>
@@ -8049,7 +8050,7 @@
                 <a:ea typeface="Calibri" pitchFamily="34" charset="-122"/>
                 <a:cs typeface="Calibri" pitchFamily="34" charset="-120"/>
               </a:rPr>
-              <a:t>19 / 19</a:t>
+              <a:t>20 / 20</a:t>
             </a:r>
             <a:endParaRPr lang="en-US" sz="1000" dirty="0"/>
           </a:p>
@@ -8124,7 +8125,7 @@
         <p:spPr>
           <a:xfrm>
             <a:off x="0" y="6784848"/>
-            <a:ext cx="1283336" cy="41148"/>
+            <a:ext cx="1219170" cy="41148"/>
           </a:xfrm>
           <a:prstGeom prst="rect">
             <a:avLst/>
@@ -8175,7 +8176,7 @@
                 <a:ea typeface="Calibri" pitchFamily="34" charset="-122"/>
                 <a:cs typeface="Calibri" pitchFamily="34" charset="-120"/>
               </a:rPr>
-              <a:t>02 / 19</a:t>
+              <a:t>02 / 20</a:t>
             </a:r>
             <a:endParaRPr lang="en-US" sz="1000" dirty="0"/>
           </a:p>
@@ -8984,6 +8985,775 @@
                 <a:cs typeface="Calibri" pitchFamily="34" charset="-120"/>
               </a:rPr>
               <a:t>Skills gained, challenges, and where Synkro goes from here</a:t>
+            </a:r>
+            <a:endParaRPr lang="en-US" sz="1250" dirty="0"/>
+          </a:p>
+        </p:txBody>
+      </p:sp>
+    </p:spTree>
+  </p:cSld>
+  <p:clrMapOvr>
+    <a:masterClrMapping/>
+  </p:clrMapOvr>
+</p:sld>
+</file>
+
+<file path=ppt/slides/slide20.xml><?xml version="1.0" encoding="utf-8"?>
+<p:sld xmlns:a="http://schemas.openxmlformats.org/drawingml/2006/main" xmlns:r="http://schemas.openxmlformats.org/officeDocument/2006/relationships" xmlns:p="http://schemas.openxmlformats.org/presentationml/2006/main">
+  <p:cSld name="Slide 16">
+    <p:bg>
+      <p:bgPr>
+        <a:solidFill>
+          <a:srgbClr val="FFFFFF"/>
+        </a:solidFill>
+        <a:effectLst/>
+      </p:bgPr>
+    </p:bg>
+    <p:spTree>
+      <p:nvGrpSpPr>
+        <p:cNvPr id="1" name=""/>
+        <p:cNvGrpSpPr/>
+        <p:nvPr/>
+      </p:nvGrpSpPr>
+      <p:grpSpPr>
+        <a:xfrm>
+          <a:off x="0" y="0"/>
+          <a:ext cx="0" cy="0"/>
+          <a:chOff x="0" y="0"/>
+          <a:chExt cx="0" cy="0"/>
+        </a:xfrm>
+      </p:grpSpPr>
+      <p:sp>
+        <p:nvSpPr>
+          <p:cNvPr id="2" name="Shape 0"/>
+          <p:cNvSpPr/>
+          <p:nvPr/>
+        </p:nvSpPr>
+        <p:spPr>
+          <a:xfrm>
+            <a:off x="0" y="6784848"/>
+            <a:ext cx="12191695" cy="41148"/>
+          </a:xfrm>
+          <a:prstGeom prst="rect">
+            <a:avLst/>
+          </a:prstGeom>
+          <a:solidFill>
+            <a:srgbClr val="E2E4F0"/>
+          </a:solidFill>
+          <a:ln/>
+        </p:spPr>
+        <p:txBody>
+          <a:bodyPr/>
+          <a:lstStyle/>
+          <a:p>
+            <a:endParaRPr lang="en-US"/>
+          </a:p>
+        </p:txBody>
+      </p:sp>
+      <p:sp>
+        <p:nvSpPr>
+          <p:cNvPr id="3" name="Shape 1"/>
+          <p:cNvSpPr/>
+          <p:nvPr/>
+        </p:nvSpPr>
+        <p:spPr>
+          <a:xfrm>
+            <a:off x="0" y="6784848"/>
+            <a:ext cx="4876678" cy="41148"/>
+          </a:xfrm>
+          <a:prstGeom prst="rect">
+            <a:avLst/>
+          </a:prstGeom>
+          <a:solidFill>
+            <a:srgbClr val="4F46E5"/>
+          </a:solidFill>
+          <a:ln/>
+        </p:spPr>
+        <p:txBody>
+          <a:bodyPr/>
+          <a:lstStyle/>
+          <a:p>
+            <a:endParaRPr lang="en-US"/>
+          </a:p>
+        </p:txBody>
+      </p:sp>
+      <p:sp>
+        <p:nvSpPr>
+          <p:cNvPr id="4" name="Text 2"/>
+          <p:cNvSpPr/>
+          <p:nvPr/>
+        </p:nvSpPr>
+        <p:spPr>
+          <a:xfrm>
+            <a:off x="11002975" y="6492240"/>
+            <a:ext cx="1051560" cy="274320"/>
+          </a:xfrm>
+          <a:prstGeom prst="rect">
+            <a:avLst/>
+          </a:prstGeom>
+          <a:noFill/>
+          <a:ln/>
+        </p:spPr>
+        <p:txBody>
+          <a:bodyPr wrap="square" rtlCol="0" anchor="ctr"/>
+          <a:lstStyle/>
+          <a:p>
+            <a:pPr marL="0" indent="0" algn="r">
+              <a:buNone/>
+            </a:pPr>
+            <a:r>
+              <a:rPr lang="en-US" sz="1000" dirty="0">
+                <a:solidFill>
+                  <a:srgbClr val="6B7280"/>
+                </a:solidFill>
+                <a:latin typeface="Calibri" pitchFamily="34" charset="0"/>
+                <a:ea typeface="Calibri" pitchFamily="34" charset="-122"/>
+                <a:cs typeface="Calibri" pitchFamily="34" charset="-120"/>
+              </a:rPr>
+              <a:t>08 / 20</a:t>
+            </a:r>
+            <a:endParaRPr lang="en-US" sz="1000" dirty="0"/>
+          </a:p>
+        </p:txBody>
+      </p:sp>
+      <p:sp>
+        <p:nvSpPr>
+          <p:cNvPr id="5" name="Text 3"/>
+          <p:cNvSpPr/>
+          <p:nvPr/>
+        </p:nvSpPr>
+        <p:spPr>
+          <a:xfrm>
+            <a:off x="548640" y="411480"/>
+            <a:ext cx="7315200" cy="320040"/>
+          </a:xfrm>
+          <a:prstGeom prst="rect">
+            <a:avLst/>
+          </a:prstGeom>
+          <a:noFill/>
+          <a:ln/>
+        </p:spPr>
+        <p:txBody>
+          <a:bodyPr wrap="square" rtlCol="0" anchor="ctr"/>
+          <a:lstStyle/>
+          <a:p>
+            <a:pPr marL="0" indent="0">
+              <a:buNone/>
+            </a:pPr>
+            <a:r>
+              <a:rPr lang="en-US" sz="1200" b="1" kern="0" spc="200" dirty="0">
+                <a:solidFill>
+                  <a:srgbClr val="4F46E5"/>
+                </a:solidFill>
+                <a:latin typeface="Calibri" pitchFamily="34" charset="0"/>
+                <a:ea typeface="Calibri" pitchFamily="34" charset="-122"/>
+                <a:cs typeface="Calibri" pitchFamily="34" charset="-120"/>
+              </a:rPr>
+              <a:t>02 · SOLUTION &amp; METHODOLOGY</a:t>
+            </a:r>
+            <a:endParaRPr lang="en-US" sz="1200" dirty="0"/>
+          </a:p>
+        </p:txBody>
+      </p:sp>
+      <p:sp>
+        <p:nvSpPr>
+          <p:cNvPr id="6" name="Text 4"/>
+          <p:cNvSpPr/>
+          <p:nvPr/>
+        </p:nvSpPr>
+        <p:spPr>
+          <a:xfrm>
+            <a:off x="548640" y="713232"/>
+            <a:ext cx="10515600" cy="777240"/>
+          </a:xfrm>
+          <a:prstGeom prst="rect">
+            <a:avLst/>
+          </a:prstGeom>
+          <a:noFill/>
+          <a:ln/>
+        </p:spPr>
+        <p:txBody>
+          <a:bodyPr wrap="square" rtlCol="0" anchor="ctr"/>
+          <a:lstStyle/>
+          <a:p>
+            <a:pPr marL="0" indent="0">
+              <a:buNone/>
+            </a:pPr>
+            <a:r>
+              <a:rPr lang="en-US" sz="3200" b="1" dirty="0">
+                <a:solidFill>
+                  <a:srgbClr val="1B1F3B"/>
+                </a:solidFill>
+                <a:latin typeface="Cambria" pitchFamily="34" charset="0"/>
+                <a:ea typeface="Cambria" pitchFamily="34" charset="-122"/>
+                <a:cs typeface="Cambria" pitchFamily="34" charset="-120"/>
+              </a:rPr>
+              <a:t>Requirements specification</a:t>
+            </a:r>
+            <a:endParaRPr lang="en-US" sz="3200" dirty="0"/>
+          </a:p>
+        </p:txBody>
+      </p:sp>
+      <p:sp>
+        <p:nvSpPr>
+          <p:cNvPr id="7" name="Shape 5"/>
+          <p:cNvSpPr/>
+          <p:nvPr/>
+        </p:nvSpPr>
+        <p:spPr>
+          <a:xfrm>
+            <a:off x="548640" y="1691640"/>
+            <a:ext cx="5349240" cy="4480560"/>
+          </a:xfrm>
+          <a:prstGeom prst="roundRect">
+            <a:avLst>
+              <a:gd name="adj" fmla="val 1837"/>
+            </a:avLst>
+          </a:prstGeom>
+          <a:solidFill>
+            <a:srgbClr val="F5F6FC"/>
+          </a:solidFill>
+          <a:ln/>
+        </p:spPr>
+        <p:txBody>
+          <a:bodyPr/>
+          <a:lstStyle/>
+          <a:p>
+            <a:endParaRPr lang="en-US"/>
+          </a:p>
+        </p:txBody>
+      </p:sp>
+      <p:sp>
+        <p:nvSpPr>
+          <p:cNvPr id="8" name="Text 6"/>
+          <p:cNvSpPr/>
+          <p:nvPr/>
+        </p:nvSpPr>
+        <p:spPr>
+          <a:xfrm>
+            <a:off x="868680" y="1920240"/>
+            <a:ext cx="4754880" cy="365760"/>
+          </a:xfrm>
+          <a:prstGeom prst="rect">
+            <a:avLst/>
+          </a:prstGeom>
+          <a:noFill/>
+          <a:ln/>
+        </p:spPr>
+        <p:txBody>
+          <a:bodyPr wrap="square" rtlCol="0" anchor="ctr"/>
+          <a:lstStyle/>
+          <a:p>
+            <a:pPr marL="0" indent="0">
+              <a:buNone/>
+            </a:pPr>
+            <a:r>
+              <a:rPr lang="en-US" sz="1600" b="1" dirty="0">
+                <a:solidFill>
+                  <a:srgbClr val="1B1F3B"/>
+                </a:solidFill>
+                <a:latin typeface="Cambria" pitchFamily="34" charset="0"/>
+                <a:ea typeface="Cambria" pitchFamily="34" charset="-122"/>
+                <a:cs typeface="Cambria" pitchFamily="34" charset="-120"/>
+              </a:rPr>
+              <a:t>Functional requirements</a:t>
+            </a:r>
+            <a:endParaRPr lang="en-US" sz="1600" dirty="0"/>
+          </a:p>
+        </p:txBody>
+      </p:sp>
+      <p:sp>
+        <p:nvSpPr>
+          <p:cNvPr id="9" name="Text 7"/>
+          <p:cNvSpPr/>
+          <p:nvPr/>
+        </p:nvSpPr>
+        <p:spPr>
+          <a:xfrm>
+            <a:off x="868680" y="2423160"/>
+            <a:ext cx="4754880" cy="460000"/>
+          </a:xfrm>
+          <a:prstGeom prst="rect">
+            <a:avLst/>
+          </a:prstGeom>
+          <a:noFill/>
+          <a:ln/>
+        </p:spPr>
+        <p:txBody>
+          <a:bodyPr wrap="square" rtlCol="0" anchor="ctr"/>
+          <a:lstStyle/>
+          <a:p>
+            <a:pPr marL="0" indent="0">
+              <a:buNone/>
+            </a:pPr>
+            <a:r>
+              <a:rPr lang="en-US" sz="1250" dirty="0">
+                <a:solidFill>
+                  <a:srgbClr val="1F2430"/>
+                </a:solidFill>
+                <a:latin typeface="Calibri" pitchFamily="34" charset="0"/>
+                <a:ea typeface="Calibri" pitchFamily="34" charset="-122"/>
+                <a:cs typeface="Calibri" pitchFamily="34" charset="-120"/>
+              </a:rPr>
+              <a:t>• Registration, e-mail verification, login &amp; session management</a:t>
+            </a:r>
+            <a:endParaRPr lang="en-US" sz="1250" dirty="0"/>
+          </a:p>
+        </p:txBody>
+      </p:sp>
+      <p:sp>
+        <p:nvSpPr>
+          <p:cNvPr id="10" name="Text 8"/>
+          <p:cNvSpPr/>
+          <p:nvPr/>
+        </p:nvSpPr>
+        <p:spPr>
+          <a:xfrm>
+            <a:off x="868680" y="2913160"/>
+            <a:ext cx="4754880" cy="460000"/>
+          </a:xfrm>
+          <a:prstGeom prst="rect">
+            <a:avLst/>
+          </a:prstGeom>
+          <a:noFill/>
+          <a:ln/>
+        </p:spPr>
+        <p:txBody>
+          <a:bodyPr wrap="square" rtlCol="0" anchor="ctr"/>
+          <a:lstStyle/>
+          <a:p>
+            <a:pPr marL="0" indent="0">
+              <a:buNone/>
+            </a:pPr>
+            <a:r>
+              <a:rPr lang="en-US" sz="1250" dirty="0">
+                <a:solidFill>
+                  <a:srgbClr val="1F2430"/>
+                </a:solidFill>
+                <a:latin typeface="Calibri" pitchFamily="34" charset="0"/>
+                <a:ea typeface="Calibri" pitchFamily="34" charset="-122"/>
+                <a:cs typeface="Calibri" pitchFamily="34" charset="-120"/>
+              </a:rPr>
+              <a:t>• Profile, account settings &amp; visual theme management</a:t>
+            </a:r>
+            <a:endParaRPr lang="en-US" sz="1250" dirty="0"/>
+          </a:p>
+        </p:txBody>
+      </p:sp>
+      <p:sp>
+        <p:nvSpPr>
+          <p:cNvPr id="11" name="Text 9"/>
+          <p:cNvSpPr/>
+          <p:nvPr/>
+        </p:nvSpPr>
+        <p:spPr>
+          <a:xfrm>
+            <a:off x="868680" y="3403160"/>
+            <a:ext cx="4754880" cy="460000"/>
+          </a:xfrm>
+          <a:prstGeom prst="rect">
+            <a:avLst/>
+          </a:prstGeom>
+          <a:noFill/>
+          <a:ln/>
+        </p:spPr>
+        <p:txBody>
+          <a:bodyPr wrap="square" rtlCol="0" anchor="ctr"/>
+          <a:lstStyle/>
+          <a:p>
+            <a:pPr marL="0" indent="0">
+              <a:buNone/>
+            </a:pPr>
+            <a:r>
+              <a:rPr lang="en-US" sz="1250" dirty="0">
+                <a:solidFill>
+                  <a:srgbClr val="1F2430"/>
+                </a:solidFill>
+                <a:latin typeface="Calibri" pitchFamily="34" charset="0"/>
+                <a:ea typeface="Calibri" pitchFamily="34" charset="-122"/>
+                <a:cs typeface="Calibri" pitchFamily="34" charset="-120"/>
+              </a:rPr>
+              <a:t>• Project creation, invitations &amp; role assignment</a:t>
+            </a:r>
+            <a:endParaRPr lang="en-US" sz="1250" dirty="0"/>
+          </a:p>
+        </p:txBody>
+      </p:sp>
+      <p:sp>
+        <p:nvSpPr>
+          <p:cNvPr id="12" name="Text 10"/>
+          <p:cNvSpPr/>
+          <p:nvPr/>
+        </p:nvSpPr>
+        <p:spPr>
+          <a:xfrm>
+            <a:off x="868680" y="3893160"/>
+            <a:ext cx="4754880" cy="460000"/>
+          </a:xfrm>
+          <a:prstGeom prst="rect">
+            <a:avLst/>
+          </a:prstGeom>
+          <a:noFill/>
+          <a:ln/>
+        </p:spPr>
+        <p:txBody>
+          <a:bodyPr wrap="square" rtlCol="0" anchor="ctr"/>
+          <a:lstStyle/>
+          <a:p>
+            <a:pPr marL="0" indent="0">
+              <a:buNone/>
+            </a:pPr>
+            <a:r>
+              <a:rPr lang="en-US" sz="1250" dirty="0">
+                <a:solidFill>
+                  <a:srgbClr val="1F2430"/>
+                </a:solidFill>
+                <a:latin typeface="Calibri" pitchFamily="34" charset="0"/>
+                <a:ea typeface="Calibri" pitchFamily="34" charset="-122"/>
+                <a:cs typeface="Calibri" pitchFamily="34" charset="-120"/>
+              </a:rPr>
+              <a:t>• Task lifecycle: status, checklists &amp; deliverables</a:t>
+            </a:r>
+            <a:endParaRPr lang="en-US" sz="1250" dirty="0"/>
+          </a:p>
+        </p:txBody>
+      </p:sp>
+      <p:sp>
+        <p:nvSpPr>
+          <p:cNvPr id="13" name="Text 11"/>
+          <p:cNvSpPr/>
+          <p:nvPr/>
+        </p:nvSpPr>
+        <p:spPr>
+          <a:xfrm>
+            <a:off x="868680" y="4383160"/>
+            <a:ext cx="4754880" cy="460000"/>
+          </a:xfrm>
+          <a:prstGeom prst="rect">
+            <a:avLst/>
+          </a:prstGeom>
+          <a:noFill/>
+          <a:ln/>
+        </p:spPr>
+        <p:txBody>
+          <a:bodyPr wrap="square" rtlCol="0" anchor="ctr"/>
+          <a:lstStyle/>
+          <a:p>
+            <a:pPr marL="0" indent="0">
+              <a:buNone/>
+            </a:pPr>
+            <a:r>
+              <a:rPr lang="en-US" sz="1250" dirty="0">
+                <a:solidFill>
+                  <a:srgbClr val="1F2430"/>
+                </a:solidFill>
+                <a:latin typeface="Calibri" pitchFamily="34" charset="0"/>
+                <a:ea typeface="Calibri" pitchFamily="34" charset="-122"/>
+                <a:cs typeface="Calibri" pitchFamily="34" charset="-120"/>
+              </a:rPr>
+              <a:t>• Comments, reviewer feedback &amp; real-time notifications</a:t>
+            </a:r>
+            <a:endParaRPr lang="en-US" sz="1250" dirty="0"/>
+          </a:p>
+        </p:txBody>
+      </p:sp>
+      <p:sp>
+        <p:nvSpPr>
+          <p:cNvPr id="101" name="Text 101"/>
+          <p:cNvSpPr/>
+          <p:nvPr/>
+        </p:nvSpPr>
+        <p:spPr>
+          <a:xfrm>
+            <a:off x="868680" y="4873160"/>
+            <a:ext cx="4754880" cy="460000"/>
+          </a:xfrm>
+          <a:prstGeom prst="rect">
+            <a:avLst/>
+          </a:prstGeom>
+          <a:noFill/>
+          <a:ln/>
+        </p:spPr>
+        <p:txBody>
+          <a:bodyPr wrap="square" rtlCol="0" anchor="ctr"/>
+          <a:lstStyle/>
+          <a:p>
+            <a:pPr marL="0" indent="0">
+              <a:buNone/>
+            </a:pPr>
+            <a:r>
+              <a:rPr lang="en-US" sz="1250" dirty="0">
+                <a:solidFill>
+                  <a:srgbClr val="1F2430"/>
+                </a:solidFill>
+                <a:latin typeface="Calibri" pitchFamily="34" charset="0"/>
+                <a:ea typeface="Calibri" pitchFamily="34" charset="-122"/>
+                <a:cs typeface="Calibri" pitchFamily="34" charset="-120"/>
+              </a:rPr>
+              <a:t>• Admin: user management, suspension appeals &amp; analytics</a:t>
+            </a:r>
+            <a:endParaRPr lang="en-US" sz="1250" dirty="0"/>
+          </a:p>
+        </p:txBody>
+      </p:sp>
+      <p:sp>
+        <p:nvSpPr>
+          <p:cNvPr id="14" name="Shape 12"/>
+          <p:cNvSpPr/>
+          <p:nvPr/>
+        </p:nvSpPr>
+        <p:spPr>
+          <a:xfrm>
+            <a:off x="6263640" y="1691640"/>
+            <a:ext cx="5349240" cy="4480560"/>
+          </a:xfrm>
+          <a:prstGeom prst="roundRect">
+            <a:avLst>
+              <a:gd name="adj" fmla="val 1837"/>
+            </a:avLst>
+          </a:prstGeom>
+          <a:solidFill>
+            <a:srgbClr val="1B1F3B"/>
+          </a:solidFill>
+          <a:ln/>
+        </p:spPr>
+        <p:txBody>
+          <a:bodyPr/>
+          <a:lstStyle/>
+          <a:p>
+            <a:endParaRPr lang="en-US"/>
+          </a:p>
+        </p:txBody>
+      </p:sp>
+      <p:sp>
+        <p:nvSpPr>
+          <p:cNvPr id="15" name="Text 13"/>
+          <p:cNvSpPr/>
+          <p:nvPr/>
+        </p:nvSpPr>
+        <p:spPr>
+          <a:xfrm>
+            <a:off x="6583680" y="1920240"/>
+            <a:ext cx="4754880" cy="365760"/>
+          </a:xfrm>
+          <a:prstGeom prst="rect">
+            <a:avLst/>
+          </a:prstGeom>
+          <a:noFill/>
+          <a:ln/>
+        </p:spPr>
+        <p:txBody>
+          <a:bodyPr wrap="square" rtlCol="0" anchor="ctr"/>
+          <a:lstStyle/>
+          <a:p>
+            <a:pPr marL="0" indent="0">
+              <a:buNone/>
+            </a:pPr>
+            <a:r>
+              <a:rPr lang="en-US" sz="1600" b="1" dirty="0">
+                <a:solidFill>
+                  <a:srgbClr val="FFFFFF"/>
+                </a:solidFill>
+                <a:latin typeface="Cambria" pitchFamily="34" charset="0"/>
+                <a:ea typeface="Cambria" pitchFamily="34" charset="-122"/>
+                <a:cs typeface="Cambria" pitchFamily="34" charset="-120"/>
+              </a:rPr>
+              <a:t>Non-functional requirements</a:t>
+            </a:r>
+            <a:endParaRPr lang="en-US" sz="1600" dirty="0"/>
+          </a:p>
+        </p:txBody>
+      </p:sp>
+      <p:sp>
+        <p:nvSpPr>
+          <p:cNvPr id="16" name="Text 14"/>
+          <p:cNvSpPr/>
+          <p:nvPr/>
+        </p:nvSpPr>
+        <p:spPr>
+          <a:xfrm>
+            <a:off x="6583680" y="2423160"/>
+            <a:ext cx="4754880" cy="460000"/>
+          </a:xfrm>
+          <a:prstGeom prst="rect">
+            <a:avLst/>
+          </a:prstGeom>
+          <a:noFill/>
+          <a:ln/>
+        </p:spPr>
+        <p:txBody>
+          <a:bodyPr wrap="square" rtlCol="0" anchor="ctr"/>
+          <a:lstStyle/>
+          <a:p>
+            <a:pPr marL="0" indent="0">
+              <a:buNone/>
+            </a:pPr>
+            <a:r>
+              <a:rPr lang="en-US" sz="1250" dirty="0">
+                <a:solidFill>
+                  <a:srgbClr val="C7CAF2"/>
+                </a:solidFill>
+                <a:latin typeface="Calibri" pitchFamily="34" charset="0"/>
+                <a:ea typeface="Calibri" pitchFamily="34" charset="-122"/>
+                <a:cs typeface="Calibri" pitchFamily="34" charset="-120"/>
+              </a:rPr>
+              <a:t>• Usability: clean, responsive UI on desktop &amp; mobile</a:t>
+            </a:r>
+            <a:endParaRPr lang="en-US" sz="1250" dirty="0"/>
+          </a:p>
+        </p:txBody>
+      </p:sp>
+      <p:sp>
+        <p:nvSpPr>
+          <p:cNvPr id="17" name="Text 15"/>
+          <p:cNvSpPr/>
+          <p:nvPr/>
+        </p:nvSpPr>
+        <p:spPr>
+          <a:xfrm>
+            <a:off x="6583680" y="2913160"/>
+            <a:ext cx="4754880" cy="460000"/>
+          </a:xfrm>
+          <a:prstGeom prst="rect">
+            <a:avLst/>
+          </a:prstGeom>
+          <a:noFill/>
+          <a:ln/>
+        </p:spPr>
+        <p:txBody>
+          <a:bodyPr wrap="square" rtlCol="0" anchor="ctr"/>
+          <a:lstStyle/>
+          <a:p>
+            <a:pPr marL="0" indent="0">
+              <a:buNone/>
+            </a:pPr>
+            <a:r>
+              <a:rPr lang="en-US" sz="1250" dirty="0">
+                <a:solidFill>
+                  <a:srgbClr val="C7CAF2"/>
+                </a:solidFill>
+                <a:latin typeface="Calibri" pitchFamily="34" charset="0"/>
+                <a:ea typeface="Calibri" pitchFamily="34" charset="-122"/>
+                <a:cs typeface="Calibri" pitchFamily="34" charset="-120"/>
+              </a:rPr>
+              <a:t>• Performance: real-time updates with minimal latency</a:t>
+            </a:r>
+            <a:endParaRPr lang="en-US" sz="1250" dirty="0"/>
+          </a:p>
+        </p:txBody>
+      </p:sp>
+      <p:sp>
+        <p:nvSpPr>
+          <p:cNvPr id="18" name="Text 16"/>
+          <p:cNvSpPr/>
+          <p:nvPr/>
+        </p:nvSpPr>
+        <p:spPr>
+          <a:xfrm>
+            <a:off x="6583680" y="3403160"/>
+            <a:ext cx="4754880" cy="460000"/>
+          </a:xfrm>
+          <a:prstGeom prst="rect">
+            <a:avLst/>
+          </a:prstGeom>
+          <a:noFill/>
+          <a:ln/>
+        </p:spPr>
+        <p:txBody>
+          <a:bodyPr wrap="square" rtlCol="0" anchor="ctr"/>
+          <a:lstStyle/>
+          <a:p>
+            <a:pPr marL="0" indent="0">
+              <a:buNone/>
+            </a:pPr>
+            <a:r>
+              <a:rPr lang="en-US" sz="1250" dirty="0">
+                <a:solidFill>
+                  <a:srgbClr val="C7CAF2"/>
+                </a:solidFill>
+                <a:latin typeface="Calibri" pitchFamily="34" charset="0"/>
+                <a:ea typeface="Calibri" pitchFamily="34" charset="-122"/>
+                <a:cs typeface="Calibri" pitchFamily="34" charset="-120"/>
+              </a:rPr>
+              <a:t>• Security: every sensitive action behind role-based authorization</a:t>
+            </a:r>
+            <a:endParaRPr lang="en-US" sz="1250" dirty="0"/>
+          </a:p>
+        </p:txBody>
+      </p:sp>
+      <p:sp>
+        <p:nvSpPr>
+          <p:cNvPr id="102" name="Text 102"/>
+          <p:cNvSpPr/>
+          <p:nvPr/>
+        </p:nvSpPr>
+        <p:spPr>
+          <a:xfrm>
+            <a:off x="6583680" y="3893160"/>
+            <a:ext cx="4754880" cy="460000"/>
+          </a:xfrm>
+          <a:prstGeom prst="rect">
+            <a:avLst/>
+          </a:prstGeom>
+          <a:noFill/>
+          <a:ln/>
+        </p:spPr>
+        <p:txBody>
+          <a:bodyPr wrap="square" rtlCol="0" anchor="ctr"/>
+          <a:lstStyle/>
+          <a:p>
+            <a:pPr marL="0" indent="0">
+              <a:buNone/>
+            </a:pPr>
+            <a:r>
+              <a:rPr lang="en-US" sz="1250" dirty="0">
+                <a:solidFill>
+                  <a:srgbClr val="C7CAF2"/>
+                </a:solidFill>
+                <a:latin typeface="Calibri" pitchFamily="34" charset="0"/>
+                <a:ea typeface="Calibri" pitchFamily="34" charset="-122"/>
+                <a:cs typeface="Calibri" pitchFamily="34" charset="-120"/>
+              </a:rPr>
+              <a:t>• Maintainability: MVC separation &amp; a normalized data model</a:t>
+            </a:r>
+            <a:endParaRPr lang="en-US" sz="1250" dirty="0"/>
+          </a:p>
+        </p:txBody>
+      </p:sp>
+      <p:sp>
+        <p:nvSpPr>
+          <p:cNvPr id="103" name="Text 103"/>
+          <p:cNvSpPr/>
+          <p:nvPr/>
+        </p:nvSpPr>
+        <p:spPr>
+          <a:xfrm>
+            <a:off x="6583680" y="4383160"/>
+            <a:ext cx="4754880" cy="460000"/>
+          </a:xfrm>
+          <a:prstGeom prst="rect">
+            <a:avLst/>
+          </a:prstGeom>
+          <a:noFill/>
+          <a:ln/>
+        </p:spPr>
+        <p:txBody>
+          <a:bodyPr wrap="square" rtlCol="0" anchor="ctr"/>
+          <a:lstStyle/>
+          <a:p>
+            <a:pPr marL="0" indent="0">
+              <a:buNone/>
+            </a:pPr>
+            <a:r>
+              <a:rPr lang="en-US" sz="1250" dirty="0">
+                <a:solidFill>
+                  <a:srgbClr val="C7CAF2"/>
+                </a:solidFill>
+                <a:latin typeface="Calibri" pitchFamily="34" charset="0"/>
+                <a:ea typeface="Calibri" pitchFamily="34" charset="-122"/>
+                <a:cs typeface="Calibri" pitchFamily="34" charset="-120"/>
+              </a:rPr>
+              <a:t>• Dark, light &amp; custom colour themes for user comfort</a:t>
             </a:r>
             <a:endParaRPr lang="en-US" sz="1250" dirty="0"/>
           </a:p>
@@ -9058,7 +9828,7 @@
         <p:spPr>
           <a:xfrm>
             <a:off x="0" y="6784848"/>
-            <a:ext cx="1925005" cy="41148"/>
+            <a:ext cx="1828754" cy="41148"/>
           </a:xfrm>
           <a:prstGeom prst="rect">
             <a:avLst/>
@@ -9109,7 +9879,7 @@
                 <a:ea typeface="Calibri" pitchFamily="34" charset="-122"/>
                 <a:cs typeface="Calibri" pitchFamily="34" charset="-120"/>
               </a:rPr>
-              <a:t>03 / 19</a:t>
+              <a:t>03 / 20</a:t>
             </a:r>
             <a:endParaRPr lang="en-US" sz="1000" dirty="0"/>
           </a:p>
@@ -10023,7 +10793,7 @@
         <p:spPr>
           <a:xfrm>
             <a:off x="0" y="6784848"/>
-            <a:ext cx="2566673" cy="41148"/>
+            <a:ext cx="2438339" cy="41148"/>
           </a:xfrm>
           <a:prstGeom prst="rect">
             <a:avLst/>
@@ -10074,7 +10844,7 @@
                 <a:ea typeface="Calibri" pitchFamily="34" charset="-122"/>
                 <a:cs typeface="Calibri" pitchFamily="34" charset="-120"/>
               </a:rPr>
-              <a:t>04 / 19</a:t>
+              <a:t>04 / 20</a:t>
             </a:r>
             <a:endParaRPr lang="en-US" sz="1000" dirty="0"/>
           </a:p>
@@ -11230,7 +12000,7 @@
         <p:spPr>
           <a:xfrm>
             <a:off x="0" y="6784848"/>
-            <a:ext cx="3208341" cy="41148"/>
+            <a:ext cx="3047924" cy="41148"/>
           </a:xfrm>
           <a:prstGeom prst="rect">
             <a:avLst/>
@@ -11281,7 +12051,7 @@
                 <a:ea typeface="Calibri" pitchFamily="34" charset="-122"/>
                 <a:cs typeface="Calibri" pitchFamily="34" charset="-120"/>
               </a:rPr>
-              <a:t>05 / 19</a:t>
+              <a:t>05 / 20</a:t>
             </a:r>
             <a:endParaRPr lang="en-US" sz="1000" dirty="0"/>
           </a:p>
@@ -11792,7 +12562,7 @@
         <p:spPr>
           <a:xfrm>
             <a:off x="0" y="6784848"/>
-            <a:ext cx="3850009" cy="41148"/>
+            <a:ext cx="3657508" cy="41148"/>
           </a:xfrm>
           <a:prstGeom prst="rect">
             <a:avLst/>
@@ -11843,7 +12613,7 @@
                 <a:ea typeface="Calibri" pitchFamily="34" charset="-122"/>
                 <a:cs typeface="Calibri" pitchFamily="34" charset="-120"/>
               </a:rPr>
-              <a:t>06 / 19</a:t>
+              <a:t>06 / 20</a:t>
             </a:r>
             <a:endParaRPr lang="en-US" sz="1000" dirty="0"/>
           </a:p>
@@ -12666,7 +13436,7 @@
         <p:spPr>
           <a:xfrm>
             <a:off x="0" y="6784848"/>
-            <a:ext cx="4491677" cy="41148"/>
+            <a:ext cx="4267093" cy="41148"/>
           </a:xfrm>
           <a:prstGeom prst="rect">
             <a:avLst/>
@@ -12717,7 +13487,7 @@
                 <a:ea typeface="Calibri" pitchFamily="34" charset="-122"/>
                 <a:cs typeface="Calibri" pitchFamily="34" charset="-120"/>
               </a:rPr>
-              <a:t>07 / 19</a:t>
+              <a:t>07 / 20</a:t>
             </a:r>
             <a:endParaRPr lang="en-US" sz="1000" dirty="0"/>
           </a:p>
@@ -13692,7 +14462,7 @@
         <p:spPr>
           <a:xfrm>
             <a:off x="0" y="6784848"/>
-            <a:ext cx="5133345" cy="41148"/>
+            <a:ext cx="5486263" cy="41148"/>
           </a:xfrm>
           <a:prstGeom prst="rect">
             <a:avLst/>
@@ -13743,7 +14513,7 @@
                 <a:ea typeface="Calibri" pitchFamily="34" charset="-122"/>
                 <a:cs typeface="Calibri" pitchFamily="34" charset="-120"/>
               </a:rPr>
-              <a:t>08 / 19</a:t>
+              <a:t>09 / 20</a:t>
             </a:r>
             <a:endParaRPr lang="en-US" sz="1000" dirty="0"/>
           </a:p>
@@ -14447,7 +15217,7 @@
         <p:spPr>
           <a:xfrm>
             <a:off x="0" y="6784848"/>
-            <a:ext cx="5775014" cy="41148"/>
+            <a:ext cx="6095848" cy="41148"/>
           </a:xfrm>
           <a:prstGeom prst="rect">
             <a:avLst/>
@@ -14498,7 +15268,7 @@
                 <a:ea typeface="Calibri" pitchFamily="34" charset="-122"/>
                 <a:cs typeface="Calibri" pitchFamily="34" charset="-120"/>
               </a:rPr>
-              <a:t>09 / 19</a:t>
+              <a:t>10 / 20</a:t>
             </a:r>
             <a:endParaRPr lang="en-US" sz="1000" dirty="0"/>
           </a:p>

--- a/Synkro_PFA_Defense.pptx
+++ b/Synkro_PFA_Defense.pptx
@@ -3115,6 +3115,75 @@
           </a:p>
         </p:txBody>
       </p:sp>
+      <p:sp>
+        <p:nvSpPr>
+          <p:cNvPr id="100" name="Shape 98"/>
+          <p:cNvSpPr/>
+          <p:nvPr/>
+        </p:nvSpPr>
+        <p:spPr>
+          <a:xfrm>
+            <a:off x="548640" y="4663440"/>
+            <a:ext cx="82296" cy="82296"/>
+          </a:xfrm>
+          <a:prstGeom prst="ellipse">
+            <a:avLst/>
+          </a:prstGeom>
+          <a:solidFill>
+            <a:srgbClr val="4F46E5"/>
+          </a:solidFill>
+          <a:ln/>
+        </p:spPr>
+        <p:txBody>
+          <a:bodyPr/>
+          <a:lstStyle/>
+          <a:p>
+            <a:endParaRPr lang="en-US"/>
+          </a:p>
+        </p:txBody>
+      </p:sp>
+      <p:sp>
+        <p:nvSpPr>
+          <p:cNvPr id="101" name="Text 99"/>
+          <p:cNvSpPr/>
+          <p:nvPr/>
+        </p:nvSpPr>
+        <p:spPr>
+          <a:xfrm>
+            <a:off x="777240" y="4526280"/>
+            <a:ext cx="5029200" cy="502920"/>
+          </a:xfrm>
+          <a:prstGeom prst="rect">
+            <a:avLst/>
+          </a:prstGeom>
+          <a:noFill/>
+          <a:ln/>
+        </p:spPr>
+        <p:txBody>
+          <a:bodyPr wrap="square" rtlCol="0" anchor="ctr"/>
+          <a:lstStyle/>
+          <a:p>
+            <a:pPr marL="0" indent="0">
+              <a:lnSpc>
+                <a:spcPct val="120000"/>
+              </a:lnSpc>
+              <a:buNone/>
+            </a:pPr>
+            <a:r>
+              <a:rPr lang="en-US" sz="1300" dirty="0">
+                <a:solidFill>
+                  <a:srgbClr val="1F2430"/>
+                </a:solidFill>
+                <a:latin typeface="Calibri" pitchFamily="34" charset="0"/>
+                <a:ea typeface="Calibri" pitchFamily="34" charset="-122"/>
+                <a:cs typeface="Calibri" pitchFamily="34" charset="-120"/>
+              </a:rPr>
+              <a:t>Account deactivation, reactivated automatically on next login</a:t>
+            </a:r>
+            <a:endParaRPr lang="en-US" sz="1300" dirty="0"/>
+          </a:p>
+        </p:txBody>
+      </p:sp>
       <p:pic>
         <p:nvPicPr>
           <p:cNvPr id="16" name="Image 0" descr="/home/claude/work/build/assets/screenshot_sprint1_login.png"/>
@@ -3687,6 +3756,75 @@
           </a:p>
         </p:txBody>
       </p:sp>
+      <p:sp>
+        <p:nvSpPr>
+          <p:cNvPr id="100" name="Shape 98"/>
+          <p:cNvSpPr/>
+          <p:nvPr/>
+        </p:nvSpPr>
+        <p:spPr>
+          <a:xfrm>
+            <a:off x="548640" y="4663440"/>
+            <a:ext cx="82296" cy="82296"/>
+          </a:xfrm>
+          <a:prstGeom prst="ellipse">
+            <a:avLst/>
+          </a:prstGeom>
+          <a:solidFill>
+            <a:srgbClr val="4F46E5"/>
+          </a:solidFill>
+          <a:ln/>
+        </p:spPr>
+        <p:txBody>
+          <a:bodyPr/>
+          <a:lstStyle/>
+          <a:p>
+            <a:endParaRPr lang="en-US"/>
+          </a:p>
+        </p:txBody>
+      </p:sp>
+      <p:sp>
+        <p:nvSpPr>
+          <p:cNvPr id="101" name="Text 99"/>
+          <p:cNvSpPr/>
+          <p:nvPr/>
+        </p:nvSpPr>
+        <p:spPr>
+          <a:xfrm>
+            <a:off x="777240" y="4526280"/>
+            <a:ext cx="5029200" cy="502920"/>
+          </a:xfrm>
+          <a:prstGeom prst="rect">
+            <a:avLst/>
+          </a:prstGeom>
+          <a:noFill/>
+          <a:ln/>
+        </p:spPr>
+        <p:txBody>
+          <a:bodyPr wrap="square" rtlCol="0" anchor="ctr"/>
+          <a:lstStyle/>
+          <a:p>
+            <a:pPr marL="0" indent="0">
+              <a:lnSpc>
+                <a:spcPct val="120000"/>
+              </a:lnSpc>
+              <a:buNone/>
+            </a:pPr>
+            <a:r>
+              <a:rPr lang="en-US" sz="1300" dirty="0">
+                <a:solidFill>
+                  <a:srgbClr val="1F2430"/>
+                </a:solidFill>
+                <a:latin typeface="Calibri" pitchFamily="34" charset="0"/>
+                <a:ea typeface="Calibri" pitchFamily="34" charset="-122"/>
+                <a:cs typeface="Calibri" pitchFamily="34" charset="-120"/>
+              </a:rPr>
+              <a:t>Testing Queue and bulk task actions for reviewers and managers</a:t>
+            </a:r>
+            <a:endParaRPr lang="en-US" sz="1300" dirty="0"/>
+          </a:p>
+        </p:txBody>
+      </p:sp>
       <p:pic>
         <p:nvPicPr>
           <p:cNvPr id="16" name="Image 0" descr="/home/claude/work/build/assets/screenshot_sprint2_board.png"/>
@@ -4259,6 +4397,75 @@
           </a:p>
         </p:txBody>
       </p:sp>
+      <p:sp>
+        <p:nvSpPr>
+          <p:cNvPr id="100" name="Shape 98"/>
+          <p:cNvSpPr/>
+          <p:nvPr/>
+        </p:nvSpPr>
+        <p:spPr>
+          <a:xfrm>
+            <a:off x="548640" y="4663440"/>
+            <a:ext cx="82296" cy="82296"/>
+          </a:xfrm>
+          <a:prstGeom prst="ellipse">
+            <a:avLst/>
+          </a:prstGeom>
+          <a:solidFill>
+            <a:srgbClr val="4F46E5"/>
+          </a:solidFill>
+          <a:ln/>
+        </p:spPr>
+        <p:txBody>
+          <a:bodyPr/>
+          <a:lstStyle/>
+          <a:p>
+            <a:endParaRPr lang="en-US"/>
+          </a:p>
+        </p:txBody>
+      </p:sp>
+      <p:sp>
+        <p:nvSpPr>
+          <p:cNvPr id="101" name="Text 99"/>
+          <p:cNvSpPr/>
+          <p:nvPr/>
+        </p:nvSpPr>
+        <p:spPr>
+          <a:xfrm>
+            <a:off x="777240" y="4526280"/>
+            <a:ext cx="5029200" cy="502920"/>
+          </a:xfrm>
+          <a:prstGeom prst="rect">
+            <a:avLst/>
+          </a:prstGeom>
+          <a:noFill/>
+          <a:ln/>
+        </p:spPr>
+        <p:txBody>
+          <a:bodyPr wrap="square" rtlCol="0" anchor="ctr"/>
+          <a:lstStyle/>
+          <a:p>
+            <a:pPr marL="0" indent="0">
+              <a:lnSpc>
+                <a:spcPct val="120000"/>
+              </a:lnSpc>
+              <a:buNone/>
+            </a:pPr>
+            <a:r>
+              <a:rPr lang="en-US" sz="1300" dirty="0">
+                <a:solidFill>
+                  <a:srgbClr val="1F2430"/>
+                </a:solidFill>
+                <a:latin typeface="Calibri" pitchFamily="34" charset="0"/>
+                <a:ea typeface="Calibri" pitchFamily="34" charset="-122"/>
+                <a:cs typeface="Calibri" pitchFamily="34" charset="-120"/>
+              </a:rPr>
+              <a:t>Per-project and per-task notification muting</a:t>
+            </a:r>
+            <a:endParaRPr lang="en-US" sz="1300" dirty="0"/>
+          </a:p>
+        </p:txBody>
+      </p:sp>
       <p:pic>
         <p:nvPicPr>
           <p:cNvPr id="16" name="Image 0" descr="/home/claude/work/build/assets/screenshot_sprint3_notifications.png"/>
@@ -4826,6 +5033,75 @@
                 <a:cs typeface="Calibri" pitchFamily="34" charset="-120"/>
               </a:rPr>
               <a:t>Platform-wide analytics dashboard for admins</a:t>
+            </a:r>
+            <a:endParaRPr lang="en-US" sz="1300" dirty="0"/>
+          </a:p>
+        </p:txBody>
+      </p:sp>
+      <p:sp>
+        <p:nvSpPr>
+          <p:cNvPr id="100" name="Shape 98"/>
+          <p:cNvSpPr/>
+          <p:nvPr/>
+        </p:nvSpPr>
+        <p:spPr>
+          <a:xfrm>
+            <a:off x="548640" y="4663440"/>
+            <a:ext cx="82296" cy="82296"/>
+          </a:xfrm>
+          <a:prstGeom prst="ellipse">
+            <a:avLst/>
+          </a:prstGeom>
+          <a:solidFill>
+            <a:srgbClr val="4F46E5"/>
+          </a:solidFill>
+          <a:ln/>
+        </p:spPr>
+        <p:txBody>
+          <a:bodyPr/>
+          <a:lstStyle/>
+          <a:p>
+            <a:endParaRPr lang="en-US"/>
+          </a:p>
+        </p:txBody>
+      </p:sp>
+      <p:sp>
+        <p:nvSpPr>
+          <p:cNvPr id="101" name="Text 99"/>
+          <p:cNvSpPr/>
+          <p:nvPr/>
+        </p:nvSpPr>
+        <p:spPr>
+          <a:xfrm>
+            <a:off x="777240" y="4526280"/>
+            <a:ext cx="5029200" cy="502920"/>
+          </a:xfrm>
+          <a:prstGeom prst="rect">
+            <a:avLst/>
+          </a:prstGeom>
+          <a:noFill/>
+          <a:ln/>
+        </p:spPr>
+        <p:txBody>
+          <a:bodyPr wrap="square" rtlCol="0" anchor="ctr"/>
+          <a:lstStyle/>
+          <a:p>
+            <a:pPr marL="0" indent="0">
+              <a:lnSpc>
+                <a:spcPct val="120000"/>
+              </a:lnSpc>
+              <a:buNone/>
+            </a:pPr>
+            <a:r>
+              <a:rPr lang="en-US" sz="1300" dirty="0">
+                <a:solidFill>
+                  <a:srgbClr val="1F2430"/>
+                </a:solidFill>
+                <a:latin typeface="Calibri" pitchFamily="34" charset="0"/>
+                <a:ea typeface="Calibri" pitchFamily="34" charset="-122"/>
+                <a:cs typeface="Calibri" pitchFamily="34" charset="-120"/>
+              </a:rPr>
+              <a:t>Admin temporary passwords &amp; configurable feedback categories</a:t>
             </a:r>
             <a:endParaRPr lang="en-US" sz="1300" dirty="0"/>
           </a:p>

--- a/Synkro_PFA_Defense.pptx
+++ b/Synkro_PFA_Defense.pptx
@@ -3179,6 +3179,75 @@
                 <a:cs typeface="Calibri" pitchFamily="34" charset="-120"/>
               </a:rPr>
               <a:t>Account deactivation, reactivated automatically on next login</a:t>
+            </a:r>
+            <a:endParaRPr lang="en-US" sz="1300" dirty="0"/>
+          </a:p>
+        </p:txBody>
+      </p:sp>
+      <p:sp>
+        <p:nvSpPr>
+          <p:cNvPr id="200" name="Shape 198"/>
+          <p:cNvSpPr/>
+          <p:nvPr/>
+        </p:nvSpPr>
+        <p:spPr>
+          <a:xfrm>
+            <a:off x="548640" y="5321808"/>
+            <a:ext cx="82296" cy="82296"/>
+          </a:xfrm>
+          <a:prstGeom prst="ellipse">
+            <a:avLst/>
+          </a:prstGeom>
+          <a:solidFill>
+            <a:srgbClr val="4F46E5"/>
+          </a:solidFill>
+          <a:ln/>
+        </p:spPr>
+        <p:txBody>
+          <a:bodyPr/>
+          <a:lstStyle/>
+          <a:p>
+            <a:endParaRPr lang="en-US"/>
+          </a:p>
+        </p:txBody>
+      </p:sp>
+      <p:sp>
+        <p:nvSpPr>
+          <p:cNvPr id="201" name="Text 199"/>
+          <p:cNvSpPr/>
+          <p:nvPr/>
+        </p:nvSpPr>
+        <p:spPr>
+          <a:xfrm>
+            <a:off x="777240" y="5184648"/>
+            <a:ext cx="5029200" cy="502920"/>
+          </a:xfrm>
+          <a:prstGeom prst="rect">
+            <a:avLst/>
+          </a:prstGeom>
+          <a:noFill/>
+          <a:ln/>
+        </p:spPr>
+        <p:txBody>
+          <a:bodyPr wrap="square" rtlCol="0" anchor="ctr"/>
+          <a:lstStyle/>
+          <a:p>
+            <a:pPr marL="0" indent="0">
+              <a:lnSpc>
+                <a:spcPct val="120000"/>
+              </a:lnSpc>
+              <a:buNone/>
+            </a:pPr>
+            <a:r>
+              <a:rPr lang="en-US" sz="1300" dirty="0">
+                <a:solidFill>
+                  <a:srgbClr val="1F2430"/>
+                </a:solidFill>
+                <a:latin typeface="Calibri" pitchFamily="34" charset="0"/>
+                <a:ea typeface="Calibri" pitchFamily="34" charset="-122"/>
+                <a:cs typeface="Calibri" pitchFamily="34" charset="-120"/>
+              </a:rPr>
+              <a:t>On-page restore prompt when a deleted account tries to log in</a:t>
             </a:r>
             <a:endParaRPr lang="en-US" sz="1300" dirty="0"/>
           </a:p>

--- a/Synkro_PFA_Defense.pptx
+++ b/Synkro_PFA_Defense.pptx
@@ -4530,6 +4530,75 @@
                 <a:cs typeface="Calibri" pitchFamily="34" charset="-120"/>
               </a:rPr>
               <a:t>Per-project and per-task notification muting</a:t>
+            </a:r>
+            <a:endParaRPr lang="en-US" sz="1300" dirty="0"/>
+          </a:p>
+        </p:txBody>
+      </p:sp>
+      <p:sp>
+        <p:nvSpPr>
+          <p:cNvPr id="200" name="Shape 198"/>
+          <p:cNvSpPr/>
+          <p:nvPr/>
+        </p:nvSpPr>
+        <p:spPr>
+          <a:xfrm>
+            <a:off x="548640" y="5321808"/>
+            <a:ext cx="82296" cy="82296"/>
+          </a:xfrm>
+          <a:prstGeom prst="ellipse">
+            <a:avLst/>
+          </a:prstGeom>
+          <a:solidFill>
+            <a:srgbClr val="4F46E5"/>
+          </a:solidFill>
+          <a:ln/>
+        </p:spPr>
+        <p:txBody>
+          <a:bodyPr/>
+          <a:lstStyle/>
+          <a:p>
+            <a:endParaRPr lang="en-US"/>
+          </a:p>
+        </p:txBody>
+      </p:sp>
+      <p:sp>
+        <p:nvSpPr>
+          <p:cNvPr id="201" name="Text 199"/>
+          <p:cNvSpPr/>
+          <p:nvPr/>
+        </p:nvSpPr>
+        <p:spPr>
+          <a:xfrm>
+            <a:off x="777240" y="5184648"/>
+            <a:ext cx="5029200" cy="502920"/>
+          </a:xfrm>
+          <a:prstGeom prst="rect">
+            <a:avLst/>
+          </a:prstGeom>
+          <a:noFill/>
+          <a:ln/>
+        </p:spPr>
+        <p:txBody>
+          <a:bodyPr wrap="square" rtlCol="0" anchor="ctr"/>
+          <a:lstStyle/>
+          <a:p>
+            <a:pPr marL="0" indent="0">
+              <a:lnSpc>
+                <a:spcPct val="120000"/>
+              </a:lnSpc>
+              <a:buNone/>
+            </a:pPr>
+            <a:r>
+              <a:rPr lang="en-US" sz="1300" dirty="0">
+                <a:solidFill>
+                  <a:srgbClr val="1F2430"/>
+                </a:solidFill>
+                <a:latin typeface="Calibri" pitchFamily="34" charset="0"/>
+                <a:ea typeface="Calibri" pitchFamily="34" charset="-122"/>
+                <a:cs typeface="Calibri" pitchFamily="34" charset="-120"/>
+              </a:rPr>
+              <a:t>Personal dashboard: activity charts, calendars &amp; My Notes</a:t>
             </a:r>
             <a:endParaRPr lang="en-US" sz="1300" dirty="0"/>
           </a:p>

--- a/Synkro_PFA_Defense.pptx
+++ b/Synkro_PFA_Defense.pptx
@@ -3888,7 +3888,7 @@
                 <a:ea typeface="Calibri" pitchFamily="34" charset="-122"/>
                 <a:cs typeface="Calibri" pitchFamily="34" charset="-120"/>
               </a:rPr>
-              <a:t>Testing Queue and bulk task actions for reviewers and managers</a:t>
+              <a:t>Testing Queue, personal My Tasks list, and bulk task actions for reviewers and managers</a:t>
             </a:r>
             <a:endParaRPr lang="en-US" sz="1300" dirty="0"/>
           </a:p>

--- a/Synkro_PFA_Defense.pptx
+++ b/Synkro_PFA_Defense.pptx
@@ -4599,6 +4599,75 @@
                 <a:cs typeface="Calibri" pitchFamily="34" charset="-120"/>
               </a:rPr>
               <a:t>Personal dashboard: activity charts, calendars &amp; My Notes</a:t>
+            </a:r>
+            <a:endParaRPr lang="en-US" sz="1300" dirty="0"/>
+          </a:p>
+        </p:txBody>
+      </p:sp>
+      <p:sp>
+        <p:nvSpPr>
+          <p:cNvPr id="300" name="Shape 298"/>
+          <p:cNvSpPr/>
+          <p:nvPr/>
+        </p:nvSpPr>
+        <p:spPr>
+          <a:xfrm>
+            <a:off x="548640" y="5980176"/>
+            <a:ext cx="82296" cy="82296"/>
+          </a:xfrm>
+          <a:prstGeom prst="ellipse">
+            <a:avLst/>
+          </a:prstGeom>
+          <a:solidFill>
+            <a:srgbClr val="4F46E5"/>
+          </a:solidFill>
+          <a:ln/>
+        </p:spPr>
+        <p:txBody>
+          <a:bodyPr/>
+          <a:lstStyle/>
+          <a:p>
+            <a:endParaRPr lang="en-US"/>
+          </a:p>
+        </p:txBody>
+      </p:sp>
+      <p:sp>
+        <p:nvSpPr>
+          <p:cNvPr id="301" name="Text 299"/>
+          <p:cNvSpPr/>
+          <p:nvPr/>
+        </p:nvSpPr>
+        <p:spPr>
+          <a:xfrm>
+            <a:off x="777240" y="5843016"/>
+            <a:ext cx="5029200" cy="502920"/>
+          </a:xfrm>
+          <a:prstGeom prst="rect">
+            <a:avLst/>
+          </a:prstGeom>
+          <a:noFill/>
+          <a:ln/>
+        </p:spPr>
+        <p:txBody>
+          <a:bodyPr wrap="square" rtlCol="0" anchor="ctr"/>
+          <a:lstStyle/>
+          <a:p>
+            <a:pPr marL="0" indent="0">
+              <a:lnSpc>
+                <a:spcPct val="120000"/>
+              </a:lnSpc>
+              <a:buNone/>
+            </a:pPr>
+            <a:r>
+              <a:rPr lang="en-US" sz="1300" dirty="0">
+                <a:solidFill>
+                  <a:srgbClr val="1F2430"/>
+                </a:solidFill>
+                <a:latin typeface="Calibri" pitchFamily="34" charset="0"/>
+                <a:ea typeface="Calibri" pitchFamily="34" charset="-122"/>
+                <a:cs typeface="Calibri" pitchFamily="34" charset="-120"/>
+              </a:rPr>
+              <a:t>Personal reminders and configurable per-task deadline alerts</a:t>
             </a:r>
             <a:endParaRPr lang="en-US" sz="1300" dirty="0"/>
           </a:p>

--- a/Synkro_PFA_Defense.pptx
+++ b/Synkro_PFA_Defense.pptx
@@ -3888,7 +3888,7 @@
                 <a:ea typeface="Calibri" pitchFamily="34" charset="-122"/>
                 <a:cs typeface="Calibri" pitchFamily="34" charset="-120"/>
               </a:rPr>
-              <a:t>Testing Queue, personal My Tasks list, and bulk task actions for reviewers and managers</a:t>
+              <a:t>Testing Queue, personal My Tasks list with pinning and archiving, and bulk task actions for reviewers and managers</a:t>
             </a:r>
             <a:endParaRPr lang="en-US" sz="1300" dirty="0"/>
           </a:p>

--- a/Synkro_PFA_Defense.pptx
+++ b/Synkro_PFA_Defense.pptx
@@ -2474,7 +2474,7 @@
                 <a:ea typeface="Calibri" pitchFamily="34" charset="-122"/>
                 <a:cs typeface="Calibri" pitchFamily="34" charset="-120"/>
               </a:rPr>
-              <a:t>Mr. Mkaissi Khalil — Kernel Solution &amp; Innovation
+              <a:t>Mr. Mkaissi Khalil · Kernel Solution &amp; Innovation
 </a:t>
             </a:r>
             <a:r>
@@ -2497,7 +2497,7 @@
                 <a:ea typeface="Calibri" pitchFamily="34" charset="-122"/>
                 <a:cs typeface="Calibri" pitchFamily="34" charset="-120"/>
               </a:rPr>
-              <a:t>ISLAIB — Licence GLSI — Academic Year 2025–2026</a:t>
+              <a:t>ISLAIB · Licence GLSI · Academic Year 2025-2026</a:t>
             </a:r>
             <a:endParaRPr lang="en-US" sz="1300" dirty="0"/>
           </a:p>
@@ -2794,7 +2794,7 @@
                 <a:ea typeface="Cambria" pitchFamily="34" charset="-122"/>
                 <a:cs typeface="Cambria" pitchFamily="34" charset="-120"/>
               </a:rPr>
-              <a:t>Sprint 1 — Authentication &amp; User Management</a:t>
+              <a:t>Sprint 1: Authentication &amp; User Management</a:t>
             </a:r>
             <a:endParaRPr lang="en-US" sz="2600" dirty="0"/>
           </a:p>
@@ -2833,7 +2833,7 @@
                 <a:ea typeface="Calibri" pitchFamily="34" charset="-122"/>
                 <a:cs typeface="Calibri" pitchFamily="34" charset="-120"/>
               </a:rPr>
-              <a:t>June 22 – July 3, 2026</a:t>
+              <a:t>June 22 - July 3, 2026</a:t>
             </a:r>
             <a:endParaRPr lang="en-US" sz="1250" dirty="0"/>
           </a:p>
@@ -3504,7 +3504,7 @@
                 <a:ea typeface="Cambria" pitchFamily="34" charset="-122"/>
                 <a:cs typeface="Cambria" pitchFamily="34" charset="-120"/>
               </a:rPr>
-              <a:t>Sprint 2 — Project &amp; Task Management</a:t>
+              <a:t>Sprint 2: Project &amp; Task Management</a:t>
             </a:r>
             <a:endParaRPr lang="en-US" sz="2600" dirty="0"/>
           </a:p>
@@ -3543,7 +3543,7 @@
                 <a:ea typeface="Calibri" pitchFamily="34" charset="-122"/>
                 <a:cs typeface="Calibri" pitchFamily="34" charset="-120"/>
               </a:rPr>
-              <a:t>July 6 – July 17, 2026</a:t>
+              <a:t>July 6 - July 17, 2026</a:t>
             </a:r>
             <a:endParaRPr lang="en-US" sz="1250" dirty="0"/>
           </a:p>
@@ -4145,7 +4145,7 @@
                 <a:ea typeface="Cambria" pitchFamily="34" charset="-122"/>
                 <a:cs typeface="Cambria" pitchFamily="34" charset="-120"/>
               </a:rPr>
-              <a:t>Sprint 3 — Real-Time Collaboration</a:t>
+              <a:t>Sprint 3: Real-Time Collaboration</a:t>
             </a:r>
             <a:endParaRPr lang="en-US" sz="2600" dirty="0"/>
           </a:p>
@@ -4184,7 +4184,7 @@
                 <a:ea typeface="Calibri" pitchFamily="34" charset="-122"/>
                 <a:cs typeface="Calibri" pitchFamily="34" charset="-120"/>
               </a:rPr>
-              <a:t>July 20 – July 24, 2026</a:t>
+              <a:t>July 20 - July 24, 2026</a:t>
             </a:r>
             <a:endParaRPr lang="en-US" sz="1250" dirty="0"/>
           </a:p>
@@ -4924,7 +4924,7 @@
                 <a:ea typeface="Cambria" pitchFamily="34" charset="-122"/>
                 <a:cs typeface="Cambria" pitchFamily="34" charset="-120"/>
               </a:rPr>
-              <a:t>Sprint 4 — Administration &amp; Analytics</a:t>
+              <a:t>Sprint 4: Administration &amp; Analytics</a:t>
             </a:r>
             <a:endParaRPr lang="en-US" sz="2600" dirty="0"/>
           </a:p>
@@ -4963,7 +4963,7 @@
                 <a:ea typeface="Calibri" pitchFamily="34" charset="-122"/>
                 <a:cs typeface="Calibri" pitchFamily="34" charset="-120"/>
               </a:rPr>
-              <a:t>July 27 – July 31, 2026</a:t>
+              <a:t>July 27 - July 31, 2026</a:t>
             </a:r>
             <a:endParaRPr lang="en-US" sz="1250" dirty="0"/>
           </a:p>
@@ -8194,7 +8194,7 @@
                 <a:ea typeface="Calibri" pitchFamily="34" charset="-122"/>
                 <a:cs typeface="Calibri" pitchFamily="34" charset="-120"/>
               </a:rPr>
-              <a:t>Synkro meets every objective set out at the start of this internship: role-aware collaboration, real-time updates, and a full administration layer — delivered through a disciplined, sprint-based process from requirements to a working product.</a:t>
+              <a:t>Synkro meets every objective set out at the start of this internship: role-aware collaboration, real-time updates, and a full administration layer, delivered through a disciplined, sprint-based process from requirements to a working product.</a:t>
             </a:r>
             <a:endParaRPr lang="en-US" sz="1550" dirty="0"/>
           </a:p>
@@ -8236,7 +8236,7 @@
                 <a:ea typeface="Calibri" pitchFamily="34" charset="-122"/>
                 <a:cs typeface="Calibri" pitchFamily="34" charset="-120"/>
               </a:rPr>
-              <a:t>This internship was a complete, hands-on exercise in software engineering — not just a product, but the judgment built while shipping it under real constraints.</a:t>
+              <a:t>This internship was a complete, hands-on exercise in software engineering: not just a product, but the judgment built while shipping it under real constraints.</a:t>
             </a:r>
             <a:endParaRPr lang="en-US" sz="1550" dirty="0"/>
           </a:p>
@@ -8440,7 +8440,7 @@
                 <a:ea typeface="Calibri" pitchFamily="34" charset="-122"/>
                 <a:cs typeface="Calibri" pitchFamily="34" charset="-120"/>
               </a:rPr>
-              <a:t>Adem Ouerhani  ·  Synkro  ·  ISLAIB — Licence GLSI</a:t>
+              <a:t>Adem Ouerhani  ·  Synkro  ·  ISLAIB · Licence GLSI</a:t>
             </a:r>
             <a:endParaRPr lang="en-US" sz="1300" dirty="0"/>
           </a:p>
@@ -10482,7 +10482,7 @@
                 <a:ea typeface="Calibri" pitchFamily="34" charset="-122"/>
                 <a:cs typeface="Calibri" pitchFamily="34" charset="-120"/>
               </a:rPr>
-              <a:t>A digital agency in Hammam-Lif, Tunisia, with over seven years of experience turning client ideas into complete digital products — custom software, mobile apps, web design, and digital marketing.</a:t>
+              <a:t>A digital agency in Hammam-Lif, Tunisia, with over seven years of experience turning client ideas into complete digital products: custom software, mobile apps, web design, and digital marketing.</a:t>
             </a:r>
             <a:endParaRPr lang="en-US" sz="1400" dirty="0"/>
           </a:p>
@@ -11444,7 +11444,7 @@
                 <a:ea typeface="Calibri" pitchFamily="34" charset="-122"/>
                 <a:cs typeface="Calibri" pitchFamily="34" charset="-120"/>
               </a:rPr>
-              <a:t>Small teams need simplicity, live collaboration, and fine-grained role control together — a combination the market rarely offers in one lightweight product.</a:t>
+              <a:t>Small teams need simplicity, live collaboration, and fine-grained role control together, a combination the market rarely offers in one lightweight product.</a:t>
             </a:r>
             <a:endParaRPr lang="en-US" sz="1350" dirty="0"/>
           </a:p>
@@ -12654,7 +12654,7 @@
                 <a:ea typeface="Calibri" pitchFamily="34" charset="-122"/>
                 <a:cs typeface="Calibri" pitchFamily="34" charset="-120"/>
               </a:rPr>
-              <a:t>A collaborative web platform where teams create projects, assign role-based responsibilities, move tasks through a clear status workflow, and stay instantly informed — all built solo in seven weeks.</a:t>
+              <a:t>A collaborative web platform where teams create projects, assign role-based responsibilities, move tasks through a clear status workflow, and stay instantly informed. All built solo in seven weeks.</a:t>
             </a:r>
             <a:endParaRPr lang="en-US" sz="1450" dirty="0"/>
           </a:p>
@@ -15155,7 +15155,7 @@
                 <a:ea typeface="Calibri" pitchFamily="34" charset="-122"/>
                 <a:cs typeface="Calibri" pitchFamily="34" charset="-120"/>
               </a:rPr>
-              <a:t>As sole developer and de facto product owner, the internship followed a planning sprint (Sprint 0) plus four development sprints, each shipping a working, demonstrable increment — modeled beforehand with UML use case, sequence, and class diagrams.</a:t>
+              <a:t>As sole developer and de facto product owner, the internship followed a planning sprint (Sprint 0) plus four development sprints, each shipping a working, demonstrable increment, modeled beforehand with UML use case, sequence, and class diagrams.</a:t>
             </a:r>
             <a:endParaRPr lang="en-US" sz="1300" dirty="0"/>
           </a:p>
@@ -15829,7 +15829,7 @@
                 <a:ea typeface="Cambria" pitchFamily="34" charset="-122"/>
                 <a:cs typeface="Cambria" pitchFamily="34" charset="-120"/>
               </a:rPr>
-              <a:t>Sprint planning — June 15 to July 31, 2026</a:t>
+              <a:t>Sprint planning: June 15 to July 31, 2026</a:t>
             </a:r>
             <a:endParaRPr lang="en-US" sz="3200" dirty="0"/>
           </a:p>
@@ -15892,7 +15892,7 @@
                 <a:ea typeface="Calibri" pitchFamily="34" charset="-122"/>
                 <a:cs typeface="Calibri" pitchFamily="34" charset="-120"/>
               </a:rPr>
-              <a:t>Seven full working weeks, split into one planning sprint and four development sprints — two weeks each for the functional core (auth, project &amp; task management), one week each for the lighter, incremental features that follow.</a:t>
+              <a:t>Seven full working weeks, split into one planning sprint and four development sprints: two weeks each for the functional core (auth, project &amp; task management), one week each for the lighter, incremental features that follow.</a:t>
             </a:r>
             <a:endParaRPr lang="en-US" sz="1250" dirty="0"/>
           </a:p>

--- a/Synkro_PFA_Defense.pptx
+++ b/Synkro_PFA_Defense.pptx
@@ -6261,7 +6261,7 @@
                 <a:ea typeface="Calibri" pitchFamily="34" charset="-122"/>
                 <a:cs typeface="Calibri" pitchFamily="34" charset="-120"/>
               </a:rPr>
-              <a:t>Live snapshot from the admin analytics dashboard, built during Sprint 4.</a:t>
+              <a:t>Live snapshot from the admin analytics dashboard (internal test data), built during Sprint 4.</a:t>
             </a:r>
             <a:endParaRPr lang="en-US" sz="1250" dirty="0"/>
           </a:p>
@@ -7132,7 +7132,7 @@
         <p:spPr>
           <a:xfrm>
             <a:off x="548640" y="1737360"/>
-            <a:ext cx="5349240" cy="1234440"/>
+            <a:ext cx="5349240" cy="1090422"/>
           </a:xfrm>
           <a:prstGeom prst="roundRect">
             <a:avLst>
@@ -7160,7 +7160,7 @@
         </p:nvSpPr>
         <p:spPr>
           <a:xfrm>
-            <a:off x="749808" y="2125980"/>
+            <a:off x="749808" y="2053971"/>
             <a:ext cx="457200" cy="457200"/>
           </a:xfrm>
           <a:prstGeom prst="ellipse">
@@ -7187,7 +7187,7 @@
         </p:nvSpPr>
         <p:spPr>
           <a:xfrm>
-            <a:off x="749808" y="2125980"/>
+            <a:off x="749808" y="2053971"/>
             <a:ext cx="457200" cy="457200"/>
           </a:xfrm>
           <a:prstGeom prst="rect">
@@ -7227,7 +7227,7 @@
         <p:spPr>
           <a:xfrm>
             <a:off x="1417320" y="1737360"/>
-            <a:ext cx="4297680" cy="1234440"/>
+            <a:ext cx="4297680" cy="1090422"/>
           </a:xfrm>
           <a:prstGeom prst="rect">
             <a:avLst/>
@@ -7266,7 +7266,7 @@
         <p:spPr>
           <a:xfrm>
             <a:off x="6263640" y="1737360"/>
-            <a:ext cx="5349240" cy="1234440"/>
+            <a:ext cx="5349240" cy="1090422"/>
           </a:xfrm>
           <a:prstGeom prst="roundRect">
             <a:avLst>
@@ -7294,7 +7294,7 @@
         </p:nvSpPr>
         <p:spPr>
           <a:xfrm>
-            <a:off x="6464808" y="2125980"/>
+            <a:off x="6464808" y="2053971"/>
             <a:ext cx="457200" cy="457200"/>
           </a:xfrm>
           <a:prstGeom prst="ellipse">
@@ -7321,7 +7321,7 @@
         </p:nvSpPr>
         <p:spPr>
           <a:xfrm>
-            <a:off x="6464808" y="2125980"/>
+            <a:off x="6464808" y="2053971"/>
             <a:ext cx="457200" cy="457200"/>
           </a:xfrm>
           <a:prstGeom prst="rect">
@@ -7361,7 +7361,7 @@
         <p:spPr>
           <a:xfrm>
             <a:off x="7132320" y="1737360"/>
-            <a:ext cx="4297680" cy="1234440"/>
+            <a:ext cx="4297680" cy="1090422"/>
           </a:xfrm>
           <a:prstGeom prst="rect">
             <a:avLst/>
@@ -7399,8 +7399,8 @@
         </p:nvSpPr>
         <p:spPr>
           <a:xfrm>
-            <a:off x="548640" y="3200400"/>
-            <a:ext cx="5349240" cy="1234440"/>
+            <a:off x="548640" y="3056382"/>
+            <a:ext cx="5349240" cy="1090422"/>
           </a:xfrm>
           <a:prstGeom prst="roundRect">
             <a:avLst>
@@ -7428,7 +7428,7 @@
         </p:nvSpPr>
         <p:spPr>
           <a:xfrm>
-            <a:off x="749808" y="3589020"/>
+            <a:off x="749808" y="3372993"/>
             <a:ext cx="457200" cy="457200"/>
           </a:xfrm>
           <a:prstGeom prst="ellipse">
@@ -7455,7 +7455,7 @@
         </p:nvSpPr>
         <p:spPr>
           <a:xfrm>
-            <a:off x="749808" y="3589020"/>
+            <a:off x="749808" y="3372993"/>
             <a:ext cx="457200" cy="457200"/>
           </a:xfrm>
           <a:prstGeom prst="rect">
@@ -7494,8 +7494,8 @@
         </p:nvSpPr>
         <p:spPr>
           <a:xfrm>
-            <a:off x="1417320" y="3200400"/>
-            <a:ext cx="4297680" cy="1234440"/>
+            <a:off x="1417320" y="3056382"/>
+            <a:ext cx="4297680" cy="1090422"/>
           </a:xfrm>
           <a:prstGeom prst="rect">
             <a:avLst/>
@@ -7533,8 +7533,8 @@
         </p:nvSpPr>
         <p:spPr>
           <a:xfrm>
-            <a:off x="6263640" y="3200400"/>
-            <a:ext cx="5349240" cy="1234440"/>
+            <a:off x="6263640" y="3056382"/>
+            <a:ext cx="5349240" cy="1090422"/>
           </a:xfrm>
           <a:prstGeom prst="roundRect">
             <a:avLst>
@@ -7562,7 +7562,7 @@
         </p:nvSpPr>
         <p:spPr>
           <a:xfrm>
-            <a:off x="6464808" y="3589020"/>
+            <a:off x="6464808" y="3372993"/>
             <a:ext cx="457200" cy="457200"/>
           </a:xfrm>
           <a:prstGeom prst="ellipse">
@@ -7589,7 +7589,7 @@
         </p:nvSpPr>
         <p:spPr>
           <a:xfrm>
-            <a:off x="6464808" y="3589020"/>
+            <a:off x="6464808" y="3372993"/>
             <a:ext cx="457200" cy="457200"/>
           </a:xfrm>
           <a:prstGeom prst="rect">
@@ -7628,8 +7628,8 @@
         </p:nvSpPr>
         <p:spPr>
           <a:xfrm>
-            <a:off x="7132320" y="3200400"/>
-            <a:ext cx="4297680" cy="1234440"/>
+            <a:off x="7132320" y="3056382"/>
+            <a:ext cx="4297680" cy="1090422"/>
           </a:xfrm>
           <a:prstGeom prst="rect">
             <a:avLst/>
@@ -7667,8 +7667,8 @@
         </p:nvSpPr>
         <p:spPr>
           <a:xfrm>
-            <a:off x="548640" y="4663440"/>
-            <a:ext cx="5349240" cy="1234440"/>
+            <a:off x="548640" y="4375404"/>
+            <a:ext cx="5349240" cy="1090422"/>
           </a:xfrm>
           <a:prstGeom prst="roundRect">
             <a:avLst>
@@ -7696,7 +7696,7 @@
         </p:nvSpPr>
         <p:spPr>
           <a:xfrm>
-            <a:off x="749808" y="5052060"/>
+            <a:off x="749808" y="4692015"/>
             <a:ext cx="457200" cy="457200"/>
           </a:xfrm>
           <a:prstGeom prst="ellipse">
@@ -7723,7 +7723,7 @@
         </p:nvSpPr>
         <p:spPr>
           <a:xfrm>
-            <a:off x="749808" y="5052060"/>
+            <a:off x="749808" y="4692015"/>
             <a:ext cx="457200" cy="457200"/>
           </a:xfrm>
           <a:prstGeom prst="rect">
@@ -7762,8 +7762,8 @@
         </p:nvSpPr>
         <p:spPr>
           <a:xfrm>
-            <a:off x="1417320" y="4663440"/>
-            <a:ext cx="4297680" cy="1234440"/>
+            <a:off x="1417320" y="4375404"/>
+            <a:ext cx="4297680" cy="1090422"/>
           </a:xfrm>
           <a:prstGeom prst="rect">
             <a:avLst/>
@@ -7801,8 +7801,8 @@
         </p:nvSpPr>
         <p:spPr>
           <a:xfrm>
-            <a:off x="6263640" y="4663440"/>
-            <a:ext cx="5349240" cy="1234440"/>
+            <a:off x="6263640" y="4375404"/>
+            <a:ext cx="5349240" cy="1090422"/>
           </a:xfrm>
           <a:prstGeom prst="roundRect">
             <a:avLst>
@@ -7830,7 +7830,7 @@
         </p:nvSpPr>
         <p:spPr>
           <a:xfrm>
-            <a:off x="6464808" y="5052060"/>
+            <a:off x="6464808" y="4692015"/>
             <a:ext cx="457200" cy="457200"/>
           </a:xfrm>
           <a:prstGeom prst="ellipse">
@@ -7857,7 +7857,7 @@
         </p:nvSpPr>
         <p:spPr>
           <a:xfrm>
-            <a:off x="6464808" y="5052060"/>
+            <a:off x="6464808" y="4692015"/>
             <a:ext cx="457200" cy="457200"/>
           </a:xfrm>
           <a:prstGeom prst="rect">
@@ -7896,8 +7896,8 @@
         </p:nvSpPr>
         <p:spPr>
           <a:xfrm>
-            <a:off x="7132320" y="4663440"/>
-            <a:ext cx="4297680" cy="1234440"/>
+            <a:off x="7132320" y="4375404"/>
+            <a:ext cx="4297680" cy="1090422"/>
           </a:xfrm>
           <a:prstGeom prst="rect">
             <a:avLst/>
@@ -7922,6 +7922,274 @@
                 <a:cs typeface="Calibri" pitchFamily="34" charset="-120"/>
               </a:rPr>
               <a:t>Global search across users, projects and tasks</a:t>
+            </a:r>
+            <a:endParaRPr lang="en-US" sz="1250" dirty="0"/>
+          </a:p>
+        </p:txBody>
+      </p:sp>
+      <p:sp>
+        <p:nvSpPr>
+          <p:cNvPr id="31" name="Shape 29"/>
+          <p:cNvSpPr/>
+          <p:nvPr/>
+        </p:nvSpPr>
+        <p:spPr>
+          <a:xfrm>
+            <a:off x="548640" y="5694426"/>
+            <a:ext cx="5349240" cy="1090422"/>
+          </a:xfrm>
+          <a:prstGeom prst="roundRect">
+            <a:avLst>
+              <a:gd name="adj" fmla="val 5926"/>
+            </a:avLst>
+          </a:prstGeom>
+          <a:solidFill>
+            <a:srgbClr val="F5F6FC"/>
+          </a:solidFill>
+          <a:ln/>
+        </p:spPr>
+        <p:txBody>
+          <a:bodyPr/>
+          <a:lstStyle/>
+          <a:p>
+            <a:endParaRPr lang="en-US"/>
+          </a:p>
+        </p:txBody>
+      </p:sp>
+      <p:sp>
+        <p:nvSpPr>
+          <p:cNvPr id="32" name="Shape 30"/>
+          <p:cNvSpPr/>
+          <p:nvPr/>
+        </p:nvSpPr>
+        <p:spPr>
+          <a:xfrm>
+            <a:off x="749808" y="6011037"/>
+            <a:ext cx="457200" cy="457200"/>
+          </a:xfrm>
+          <a:prstGeom prst="ellipse">
+            <a:avLst/>
+          </a:prstGeom>
+          <a:solidFill>
+            <a:srgbClr val="4F46E5"/>
+          </a:solidFill>
+          <a:ln/>
+        </p:spPr>
+        <p:txBody>
+          <a:bodyPr/>
+          <a:lstStyle/>
+          <a:p>
+            <a:endParaRPr lang="en-US"/>
+          </a:p>
+        </p:txBody>
+      </p:sp>
+      <p:sp>
+        <p:nvSpPr>
+          <p:cNvPr id="33" name="Text 31"/>
+          <p:cNvSpPr/>
+          <p:nvPr/>
+        </p:nvSpPr>
+        <p:spPr>
+          <a:xfrm>
+            <a:off x="749808" y="6011037"/>
+            <a:ext cx="457200" cy="457200"/>
+          </a:xfrm>
+          <a:prstGeom prst="rect">
+            <a:avLst/>
+          </a:prstGeom>
+          <a:noFill/>
+          <a:ln/>
+        </p:spPr>
+        <p:txBody>
+          <a:bodyPr wrap="square" rtlCol="0" anchor="ctr"/>
+          <a:lstStyle/>
+          <a:p>
+            <a:pPr marL="0" indent="0" algn="ctr">
+              <a:buNone/>
+            </a:pPr>
+            <a:r>
+              <a:rPr lang="en-US" sz="1100" b="1" dirty="0">
+                <a:solidFill>
+                  <a:srgbClr val="FFFFFF"/>
+                </a:solidFill>
+                <a:latin typeface="Calibri" pitchFamily="34" charset="0"/>
+                <a:ea typeface="Calibri" pitchFamily="34" charset="-122"/>
+                <a:cs typeface="Calibri" pitchFamily="34" charset="-120"/>
+              </a:rPr>
+              <a:t>→</a:t>
+            </a:r>
+            <a:endParaRPr lang="en-US" sz="1100" dirty="0"/>
+          </a:p>
+        </p:txBody>
+      </p:sp>
+      <p:sp>
+        <p:nvSpPr>
+          <p:cNvPr id="34" name="Text 32"/>
+          <p:cNvSpPr/>
+          <p:nvPr/>
+        </p:nvSpPr>
+        <p:spPr>
+          <a:xfrm>
+            <a:off x="1417320" y="5694426"/>
+            <a:ext cx="4297680" cy="1090422"/>
+          </a:xfrm>
+          <a:prstGeom prst="rect">
+            <a:avLst/>
+          </a:prstGeom>
+          <a:noFill/>
+          <a:ln/>
+        </p:spPr>
+        <p:txBody>
+          <a:bodyPr wrap="square" rtlCol="0" anchor="ctr"/>
+          <a:lstStyle/>
+          <a:p>
+            <a:pPr marL="0" indent="0">
+              <a:buNone/>
+            </a:pPr>
+            <a:r>
+              <a:rPr lang="en-US" sz="1250" b="1" dirty="0">
+                <a:solidFill>
+                  <a:srgbClr val="1B1F3B"/>
+                </a:solidFill>
+                <a:latin typeface="Calibri" pitchFamily="34" charset="0"/>
+                <a:ea typeface="Calibri" pitchFamily="34" charset="-122"/>
+                <a:cs typeface="Calibri" pitchFamily="34" charset="-120"/>
+              </a:rPr>
+              <a:t>Open-source projects, showcased on public profiles</a:t>
+            </a:r>
+            <a:endParaRPr lang="en-US" sz="1250" dirty="0"/>
+          </a:p>
+        </p:txBody>
+      </p:sp>
+      <p:sp>
+        <p:nvSpPr>
+          <p:cNvPr id="35" name="Shape 33"/>
+          <p:cNvSpPr/>
+          <p:nvPr/>
+        </p:nvSpPr>
+        <p:spPr>
+          <a:xfrm>
+            <a:off x="6263640" y="5694426"/>
+            <a:ext cx="5349240" cy="1090422"/>
+          </a:xfrm>
+          <a:prstGeom prst="roundRect">
+            <a:avLst>
+              <a:gd name="adj" fmla="val 5926"/>
+            </a:avLst>
+          </a:prstGeom>
+          <a:solidFill>
+            <a:srgbClr val="F5F6FC"/>
+          </a:solidFill>
+          <a:ln/>
+        </p:spPr>
+        <p:txBody>
+          <a:bodyPr/>
+          <a:lstStyle/>
+          <a:p>
+            <a:endParaRPr lang="en-US"/>
+          </a:p>
+        </p:txBody>
+      </p:sp>
+      <p:sp>
+        <p:nvSpPr>
+          <p:cNvPr id="36" name="Shape 34"/>
+          <p:cNvSpPr/>
+          <p:nvPr/>
+        </p:nvSpPr>
+        <p:spPr>
+          <a:xfrm>
+            <a:off x="6464808" y="6011037"/>
+            <a:ext cx="457200" cy="457200"/>
+          </a:xfrm>
+          <a:prstGeom prst="ellipse">
+            <a:avLst/>
+          </a:prstGeom>
+          <a:solidFill>
+            <a:srgbClr val="4F46E5"/>
+          </a:solidFill>
+          <a:ln/>
+        </p:spPr>
+        <p:txBody>
+          <a:bodyPr/>
+          <a:lstStyle/>
+          <a:p>
+            <a:endParaRPr lang="en-US"/>
+          </a:p>
+        </p:txBody>
+      </p:sp>
+      <p:sp>
+        <p:nvSpPr>
+          <p:cNvPr id="37" name="Text 35"/>
+          <p:cNvSpPr/>
+          <p:nvPr/>
+        </p:nvSpPr>
+        <p:spPr>
+          <a:xfrm>
+            <a:off x="6464808" y="6011037"/>
+            <a:ext cx="457200" cy="457200"/>
+          </a:xfrm>
+          <a:prstGeom prst="rect">
+            <a:avLst/>
+          </a:prstGeom>
+          <a:noFill/>
+          <a:ln/>
+        </p:spPr>
+        <p:txBody>
+          <a:bodyPr wrap="square" rtlCol="0" anchor="ctr"/>
+          <a:lstStyle/>
+          <a:p>
+            <a:pPr marL="0" indent="0" algn="ctr">
+              <a:buNone/>
+            </a:pPr>
+            <a:r>
+              <a:rPr lang="en-US" sz="1100" b="1" dirty="0">
+                <a:solidFill>
+                  <a:srgbClr val="FFFFFF"/>
+                </a:solidFill>
+                <a:latin typeface="Calibri" pitchFamily="34" charset="0"/>
+                <a:ea typeface="Calibri" pitchFamily="34" charset="-122"/>
+                <a:cs typeface="Calibri" pitchFamily="34" charset="-120"/>
+              </a:rPr>
+              <a:t>→</a:t>
+            </a:r>
+            <a:endParaRPr lang="en-US" sz="1100" dirty="0"/>
+          </a:p>
+        </p:txBody>
+      </p:sp>
+      <p:sp>
+        <p:nvSpPr>
+          <p:cNvPr id="38" name="Text 36"/>
+          <p:cNvSpPr/>
+          <p:nvPr/>
+        </p:nvSpPr>
+        <p:spPr>
+          <a:xfrm>
+            <a:off x="7132320" y="5694426"/>
+            <a:ext cx="4297680" cy="1090422"/>
+          </a:xfrm>
+          <a:prstGeom prst="rect">
+            <a:avLst/>
+          </a:prstGeom>
+          <a:noFill/>
+          <a:ln/>
+        </p:spPr>
+        <p:txBody>
+          <a:bodyPr wrap="square" rtlCol="0" anchor="ctr"/>
+          <a:lstStyle/>
+          <a:p>
+            <a:pPr marL="0" indent="0">
+              <a:buNone/>
+            </a:pPr>
+            <a:r>
+              <a:rPr lang="en-US" sz="1250" b="1" dirty="0">
+                <a:solidFill>
+                  <a:srgbClr val="1B1F3B"/>
+                </a:solidFill>
+                <a:latin typeface="Calibri" pitchFamily="34" charset="0"/>
+                <a:ea typeface="Calibri" pitchFamily="34" charset="-122"/>
+                <a:cs typeface="Calibri" pitchFamily="34" charset="-120"/>
+              </a:rPr>
+              <a:t>Custom, configurable project roles</a:t>
             </a:r>
             <a:endParaRPr lang="en-US" sz="1250" dirty="0"/>
           </a:p>
